--- a/fixtures/sample-editor-text.pptx
+++ b/fixtures/sample-editor-text.pptx
@@ -293,17 +293,22 @@
             <a:pPr algn="ctr"/>
             <a:r>
               <a:rPr sz="2000">
+                <?format keep?>
                 <a:solidFill>
                   <a:srgbClr val="DC2626"/>
                 </a:solidFill>
               </a:rPr>
               <a:t>同</a:t>
             </a:r>
+            <!--paragraph-format-sentinel-->
             <a:r>
               <a:rPr sz="2000" b="1">
                 <a:solidFill>
                   <a:srgbClr val="16A34A"/>
                 </a:solidFill>
+                <a:latin typeface="Courier New"/>
+                <a:ea typeface="Courier New"/>
+                <a:cs typeface="Courier New"/>
               </a:rPr>
               <a:t>同</a:t>
             </a:r>
@@ -315,6 +320,44 @@
               </a:rPr>
               <a:t>同</a:t>
             </a:r>
+          </a:p>
+        </p:txBody>
+      </p:sp>
+      <p:sp>
+        <p:nvSpPr>
+          <p:cNvPr id="104" name="中段格式"/>
+          <p:cNvSpPr/>
+          <p:nvPr/>
+        </p:nvSpPr>
+        <p:spPr>
+          <a:xfrm>
+            <a:off x="857250" y="4857750"/>
+            <a:ext cx="5905500" cy="952500"/>
+          </a:xfrm>
+          <a:prstGeom prst="rect">
+            <a:avLst/>
+          </a:prstGeom>
+          <a:solidFill>
+            <a:srgbClr val="EFF6FF"/>
+          </a:solidFill>
+        </p:spPr>
+        <p:txBody>
+          <a:bodyPr anchor="ctr"/>
+          <a:lstStyle/>
+          <a:p>
+            <a:pPr algn="ctr"/>
+            <!--split-before:  keep-->
+            <?split-format keep = "yes"?>
+            <a:r>
+              <a:rPr sz="2000">
+                <a:solidFill>
+                  <a:srgbClr val="0F766E"/>
+                </a:solidFill>
+              </a:rPr>
+              <a:t>ABCDE</a:t>
+            </a:r>
+            <?split-after keep="two"?>
+            <!--split-after:  keep-->
           </a:p>
         </p:txBody>
       </p:sp>

--- a/fixtures/sample-editor-text.pptx
+++ b/fixtures/sample-editor-text.pptx
@@ -138,7 +138,11 @@
           </a:bodyPr>
           <a:lstStyle/>
           <a:p>
-            <a:pPr algn="l"/>
+            <a:pPr algn="l">
+              <a:lnSpc>
+                <a:spcPct xmlns:x="urn:web-ppt:test" val="100000" x:keep="spacing"/>
+              </a:lnSpc>
+            </a:pPr>
             <a:r>
               <a:rPr sz="1800">
                 <a:solidFill>
@@ -358,6 +362,84 @@
             </a:r>
             <?split-after keep="two"?>
             <!--split-after:  keep-->
+          </a:p>
+        </p:txBody>
+      </p:sp>
+      <p:sp>
+        <p:nvSpPr>
+          <p:cNvPr id="105" name="段落格式"/>
+          <p:cNvSpPr/>
+          <p:nvPr/>
+        </p:nvSpPr>
+        <p:spPr>
+          <a:xfrm>
+            <a:off x="857250" y="5905500"/>
+            <a:ext cx="9906000" cy="809625"/>
+          </a:xfrm>
+          <a:prstGeom prst="rect">
+            <a:avLst/>
+          </a:prstGeom>
+          <a:solidFill>
+            <a:srgbClr val="F0FDFA"/>
+          </a:solidFill>
+        </p:spPr>
+        <p:txBody>
+          <a:bodyPr anchor="ctr"/>
+          <a:lstStyle>
+            <a:lvl1pPr algn="r" marL="190500" indent="-95250">
+              <a:lnSpc>
+                <a:spcPct val="125000"/>
+              </a:lnSpc>
+              <a:spcBef>
+                <a:spcPts val="600"/>
+              </a:spcBef>
+              <a:spcAft>
+                <a:spcPts val="300"/>
+              </a:spcAft>
+            </a:lvl1pPr>
+          </a:lstStyle>
+          <a:p>
+            <a:pPr algn="ctr" marL="381000" indent="-190500">
+              <a:lnSpc>
+                <a:spcPts val="2400"/>
+              </a:lnSpc>
+              <a:spcBef>
+                <a:spcPts val="900"/>
+              </a:spcBef>
+              <a:spcAft>
+                <a:spcPts val="450"/>
+              </a:spcAft>
+              <?paragraph keep = "yes"?>
+              <!--paragraph-props:  keep-->
+              <a:extLst>
+                <a:ext uri="{8A5E6F70-1234-4321-ABCD-1234567890AB}">
+                  <x:keep xmlns:x="urn:web-ppt:test" value="yes"/>
+                </a:ext>
+              </a:extLst>
+            </a:pPr>
+            <a:r>
+              <a:rPr sz="1500"/>
+              <a:t>直接段落</a:t>
+            </a:r>
+          </a:p>
+          <a:p>
+            <a:r>
+              <a:rPr sz="1500"/>
+              <a:t>继承段落</a:t>
+            </a:r>
+          </a:p>
+          <a:p>
+            <a:endParaRPr sz="1500"/>
+          </a:p>
+          <a:p>
+            <a:pPr>
+              <!--unselected-ppr:  keep-->
+              <?unselected-ppr keep = "yes"?>
+            </a:pPr>
+            <a:r>
+              <a:rPr sz="1500"/>
+              <a:t>未选中段落</a:t>
+            </a:r>
           </a:p>
         </p:txBody>
       </p:sp>
